--- a/ppt/Python04-Functions.pptx
+++ b/ppt/Python04-Functions.pptx
@@ -4079,22 +4079,6 @@
               </a:rPr>
               <a:t>                            return &lt;valeur&gt;</a:t>
             </a:r>
-          </a:p>
-          <a:p>
-            <a:pPr eaLnBrk="1" hangingPunct="1"/>
-            <a:r>
-              <a:rPr lang="fr-BE" altLang="fr-FR" dirty="0"/>
-              <a:t>La surcharge est </a:t>
-            </a:r>
-            <a:r>
-              <a:rPr lang="fr-BE" altLang="fr-FR"/>
-              <a:t>autorisée en Python 3</a:t>
-            </a:r>
-            <a:endParaRPr lang="fr-BE" altLang="fr-FR" dirty="0">
-              <a:solidFill>
-                <a:schemeClr val="accent2"/>
-              </a:solidFill>
-            </a:endParaRPr>
           </a:p>
           <a:p>
             <a:pPr eaLnBrk="1" hangingPunct="1"/>
